--- a/poster/poster.pptx
+++ b/poster/poster.pptx
@@ -4034,7 +4034,7 @@
                 </a:solidFill>
                 <a:latin typeface="Calibri"/>
               </a:rPr>
-              <a:t>•  Preprocessing: drop 4 voltage outliers (&gt;10 SD), z-score on train only, chronological 80/20 split with a 64-sample seam gap between train and test.</a:t>
+              <a:t>•  Preprocessing: drop 4 voltage outliers (&gt;4 SD on any channel), z-score on train only, chronological 80/20 split with a 64-sample seam gap between train and test.</a:t>
             </a:r>
           </a:p>
           <a:p>

--- a/poster/poster.pptx
+++ b/poster/poster.pptx
@@ -3320,7 +3320,7 @@
                 </a:solidFill>
                 <a:latin typeface="Calibri"/>
               </a:rPr>
-              <a:t>Ivan Del Rio  /  Arkon Damadugula      COGS 109  •  Mukamel  •  Spring 2026      University of California, San Diego</a:t>
+              <a:t>Ivan Del Rio  /  Anish Kondamadugula      COGS 109  •  Mukamel  •  Spring 2026      University of California, San Diego</a:t>
             </a:r>
           </a:p>
         </p:txBody>

--- a/poster/poster.pptx
+++ b/poster/poster.pptx
@@ -3285,7 +3285,7 @@
                 </a:solidFill>
                 <a:latin typeface="Calibri"/>
               </a:rPr>
-              <a:t>Classifying Eye State from EEG Signals: An Honest Cross-Validation Study</a:t>
+              <a:t>Classification of EEG Eye-State via KNN: A Cross-Validation Honesty Study</a:t>
             </a:r>
           </a:p>
         </p:txBody>
@@ -3535,7 +3535,7 @@
                 </a:solidFill>
                 <a:latin typeface="Calibri"/>
               </a:rPr>
-              <a:t>We classify per-sample eye state (open vs. closed) from a single-subject 14-channel EEG recording (UCI #264, 14,980 samples) using only the methods in the COGS 109 palette: LDA, KNN, PCA→LDA, and PCR-as-classifier. The central contribution is methodological. Standard shuffled k-fold CV reports 97% accuracy for KNN, but the recording is a continuous time series with lag-1 channel autocorrelation r ≈ 0.997 and only 24 contiguous label runs, so shuffled folds leak neighbouring samples from train into test. We compare three CV schemes — shuffled, naive blocked, and stratified blocked — and show that the honest stratified blocked estimate of our best classifier is 77.8% ± 2.7%, not 97%. The headline takeaway: roughly twenty accuracy points reported in the literature on this dataset are leakage, not signal.</a:t>
+              <a:t>We pick classification as our data-analysis approach, K-nearest neighbours (KNN) as our model, and a k-sweep minimising 5-fold CV error as our model-selection procedure. We then run that same procedure under three different CV schemes — shuffled, naive blocked, and stratified blocked — on the UCI #264 EEG Eye State recording. All three schemes pick k = 1, but the picked accuracies span 47 percentage points: 97.3% ± 0.4% (shuffled, leaky), 50.0% ± 10.7% (naive blocked), and 77.8% ± 2.7% (stratified blocked, honest). The 19.5 pp gap between the leaky and honest estimates is leakage attributable to scheme choice on this autocorrelated single-subject recording, not to model quality.</a:t>
             </a:r>
           </a:p>
         </p:txBody>
@@ -3655,7 +3655,7 @@
                 </a:solidFill>
                 <a:latin typeface="Calibri"/>
               </a:rPr>
-              <a:t>Can raw 14-channel EEG voltages predict whether a person's eyes are open or closed, and how much of the accuracy reported under shuffled cross-validation is an artefact of temporal leakage?</a:t>
+              <a:t>Given an autocorrelated single-subject EEG recording and a KNN classifier, how does the choice of cross-validation scheme change the result of an otherwise-identical model-selection procedure?</a:t>
             </a:r>
           </a:p>
         </p:txBody>
@@ -3791,7 +3791,7 @@
                 </a:solidFill>
                 <a:latin typeface="Calibri"/>
               </a:rPr>
-              <a:t>•  14,980 samples × 14 Emotiv channels (AF3, F7, F3, FC5, T7, P7, O1, O2, P8, T8, FC6, F4, F8, AF4), sampled at 128 Hz over ~117 s.</a:t>
+              <a:t>•  14,980 samples × 14 Emotiv channels (AF3, F7, F3, FC5, T7, P7, O1, O2, P8, T8, FC6, F4, F8, AF4), sampled at ~128 Hz over ~117 s.</a:t>
             </a:r>
           </a:p>
           <a:p>
@@ -3839,7 +3839,7 @@
                 </a:solidFill>
                 <a:latin typeface="Calibri"/>
               </a:rPr>
-              <a:t>•  Channel autocorrelation at lag 1 ≈ 0.997 — adjacent samples are nearly identical, so shuffled folds put near-duplicates in train and test.</a:t>
+              <a:t>•  Channel autocorrelation at lag 1 ≈ 0.997 — adjacent samples are nearly identical, so any uniformly-random CV split puts near-duplicates into both train and test.</a:t>
             </a:r>
           </a:p>
         </p:txBody>
@@ -4018,7 +4018,7 @@
                 </a:solidFill>
                 <a:latin typeface="Calibri"/>
               </a:rPr>
-              <a:t>•  Models (COGS 109 palette): LDA, KNN (k tuned), PCA→LDA, PCR as binary classifier with a 0.5 threshold.</a:t>
+              <a:t>•  Approach: classification (binary eyeDetection target).</a:t>
             </a:r>
           </a:p>
           <a:p>
@@ -4034,7 +4034,7 @@
                 </a:solidFill>
                 <a:latin typeface="Calibri"/>
               </a:rPr>
-              <a:t>•  Preprocessing: drop 4 voltage outliers (&gt;4 SD on any channel), z-score on train only, chronological 80/20 split with a 64-sample seam gap between train and test.</a:t>
+              <a:t>•  Model: K-nearest neighbours with Euclidean distance in z-scored 14-D channel space. Chosen because KNN's per-sample similarity decision rule is the COGS 109-palette model most sensitive to lag-1 autocorrelation.</a:t>
             </a:r>
           </a:p>
           <a:p>
@@ -4050,7 +4050,7 @@
                 </a:solidFill>
                 <a:latin typeface="Calibri"/>
               </a:rPr>
-              <a:t>•  CV scheme A — shuffled 5-fold (leaky baseline).</a:t>
+              <a:t>•  Model selection: sweep k over {1, 3, 5, 7, 11, 15, 21, 31, 51, 75, 99, 151, 201} (log-spaced); pick the k maximising mean 5-fold CV accuracy.</a:t>
             </a:r>
           </a:p>
           <a:p>
@@ -4066,7 +4066,7 @@
                 </a:solidFill>
                 <a:latin typeface="Calibri"/>
               </a:rPr>
-              <a:t>•  CV scheme B — naive blocked 5-fold (5 contiguous time chunks).</a:t>
+              <a:t>•  CV scheme A — shuffled 5-fold (leaky baseline).</a:t>
             </a:r>
           </a:p>
           <a:p>
@@ -4082,7 +4082,7 @@
                 </a:solidFill>
                 <a:latin typeface="Calibri"/>
               </a:rPr>
-              <a:t>•  CV scheme C — stratified blocked 5-fold (100 short contiguous segments redistributed across folds to balance class proportion).</a:t>
+              <a:t>•  CV scheme B — naive blocked 5-fold (5 contiguous time chunks).</a:t>
             </a:r>
           </a:p>
           <a:p>
@@ -4098,7 +4098,23 @@
                 </a:solidFill>
                 <a:latin typeface="Calibri"/>
               </a:rPr>
-              <a:t>•  Hyperparameters chosen by maximum mean blocked CV accuracy.</a:t>
+              <a:t>•  CV scheme C — stratified blocked 5-fold (100 short contiguous segments redistributed across folds to balance class proportion; honest).</a:t>
+            </a:r>
+          </a:p>
+          <a:p>
+            <a:pPr algn="l">
+              <a:spcAft>
+                <a:spcPts val="400"/>
+              </a:spcAft>
+            </a:pPr>
+            <a:r>
+              <a:rPr sz="1800">
+                <a:solidFill>
+                  <a:srgbClr val="101010"/>
+                </a:solidFill>
+                <a:latin typeface="Calibri"/>
+              </a:rPr>
+              <a:t>•  Preprocessing: drop 4 voltage outliers (&gt;4 SD on any channel), chronological 80/20 split with a 64-sample seam gap, z-score on the training partition only.</a:t>
             </a:r>
           </a:p>
         </p:txBody>
@@ -4332,7 +4348,7 @@
       </p:sp>
       <p:pic>
         <p:nvPicPr>
-          <p:cNvPr id="29" name="Picture 28" descr="14_cv_comparison_three_way.png"/>
+          <p:cNvPr id="29" name="Picture 28" descr="11_knn_k_sweep.png"/>
           <p:cNvPicPr>
             <a:picLocks noChangeAspect="1"/>
           </p:cNvPicPr>
@@ -4347,7 +4363,7 @@
         <p:spPr>
           <a:xfrm>
             <a:off x="15118080" y="17785080"/>
-            <a:ext cx="13655040" cy="7869244"/>
+            <a:ext cx="13655040" cy="8828286"/>
           </a:xfrm>
           <a:prstGeom prst="rect">
             <a:avLst/>
@@ -4362,7 +4378,7 @@
         </p:nvSpPr>
         <p:spPr>
           <a:xfrm>
-            <a:off x="15118080" y="25700044"/>
+            <a:off x="15118080" y="26659086"/>
             <a:ext cx="13655040" cy="411480"/>
           </a:xfrm>
           <a:prstGeom prst="rect">
@@ -4384,7 +4400,7 @@
                 </a:solidFill>
                 <a:latin typeface="Calibri"/>
               </a:rPr>
-              <a:t>Fig. 2.  Three-way CV comparison — shuffled vs. naive blocked vs. stratified blocked, across LDA / KNN / PCA→LDA / PCR.</a:t>
+              <a:t>Fig. 2.  KNN mean accuracy ± std-dev vs k (log scale) under three CV schemes — all three schemes pick k = 1 but report accuracies spanning 47 percentage points.</a:t>
             </a:r>
           </a:p>
         </p:txBody>
@@ -4478,7 +4494,7 @@
         </p:nvGraphicFramePr>
         <p:xfrm>
           <a:off x="29321760" y="5897880"/>
-          <a:ext cx="13655038" cy="3108960"/>
+          <a:ext cx="13655039" cy="3108960"/>
         </p:xfrm>
         <a:graphic>
           <a:graphicData uri="http://schemas.openxmlformats.org/drawingml/2006/table">
@@ -4487,12 +4503,11 @@
                 <a:tableStyleId>{5C22544A-7EE6-4342-B048-85BDC9FD1C3A}</a:tableStyleId>
               </a:tblPr>
               <a:tblGrid>
-                <a:gridCol w="3004108"/>
-                <a:gridCol w="3550310"/>
-                <a:gridCol w="3550310"/>
-                <a:gridCol w="3550310"/>
+                <a:gridCol w="6281318"/>
+                <a:gridCol w="2457907"/>
+                <a:gridCol w="4915814"/>
               </a:tblGrid>
-              <a:tr h="621792">
+              <a:tr h="777240">
                 <a:tc>
                   <a:txBody>
                     <a:bodyPr wrap="square"/>
@@ -4500,17 +4515,17 @@
                     <a:p>
                       <a:pPr algn="l"/>
                       <a:r>
-                        <a:rPr sz="1600" b="1">
+                        <a:rPr sz="1800" b="1">
                           <a:solidFill>
                             <a:srgbClr val="FFFFFF"/>
                           </a:solidFill>
                           <a:latin typeface="Calibri"/>
                         </a:rPr>
-                        <a:t>Model</a:t>
+                        <a:t>CV scheme</a:t>
                       </a:r>
                     </a:p>
                   </a:txBody>
-                  <a:tcPr marL="73152" marR="73152" marT="36576" marB="36576">
+                  <a:tcPr marL="73152" marR="73152" marT="54864" marB="54864">
                     <a:solidFill>
                       <a:srgbClr val="1F3D7A"/>
                     </a:solidFill>
@@ -4523,29 +4538,17 @@
                     <a:p>
                       <a:pPr algn="ctr"/>
                       <a:r>
-                        <a:rPr sz="1600" b="1">
+                        <a:rPr sz="1800" b="1">
                           <a:solidFill>
                             <a:srgbClr val="FFFFFF"/>
                           </a:solidFill>
                           <a:latin typeface="Calibri"/>
                         </a:rPr>
-                        <a:t>Shuffled</a:t>
-                      </a:r>
-                    </a:p>
-                    <a:p>
-                      <a:pPr algn="ctr"/>
-                      <a:r>
-                        <a:rPr sz="1600" b="1">
-                          <a:solidFill>
-                            <a:srgbClr val="FFFFFF"/>
-                          </a:solidFill>
-                          <a:latin typeface="Calibri"/>
-                        </a:rPr>
-                        <a:t>(leaky)</a:t>
+                        <a:t>Picked k</a:t>
                       </a:r>
                     </a:p>
                   </a:txBody>
-                  <a:tcPr marL="73152" marR="73152" marT="36576" marB="36576">
+                  <a:tcPr marL="73152" marR="73152" marT="54864" marB="54864">
                     <a:solidFill>
                       <a:srgbClr val="1F3D7A"/>
                     </a:solidFill>
@@ -4558,71 +4561,24 @@
                     <a:p>
                       <a:pPr algn="ctr"/>
                       <a:r>
-                        <a:rPr sz="1600" b="1">
+                        <a:rPr sz="1800" b="1">
                           <a:solidFill>
                             <a:srgbClr val="FFFFFF"/>
                           </a:solidFill>
                           <a:latin typeface="Calibri"/>
                         </a:rPr>
-                        <a:t>Naive</a:t>
-                      </a:r>
-                    </a:p>
-                    <a:p>
-                      <a:pPr algn="ctr"/>
-                      <a:r>
-                        <a:rPr sz="1600" b="1">
-                          <a:solidFill>
-                            <a:srgbClr val="FFFFFF"/>
-                          </a:solidFill>
-                          <a:latin typeface="Calibri"/>
-                        </a:rPr>
-                        <a:t>blocked</a:t>
+                        <a:t>Mean accuracy ± std</a:t>
                       </a:r>
                     </a:p>
                   </a:txBody>
-                  <a:tcPr marL="73152" marR="73152" marT="36576" marB="36576">
-                    <a:solidFill>
-                      <a:srgbClr val="1F3D7A"/>
-                    </a:solidFill>
-                  </a:tcPr>
-                </a:tc>
-                <a:tc>
-                  <a:txBody>
-                    <a:bodyPr wrap="square"/>
-                    <a:lstStyle/>
-                    <a:p>
-                      <a:pPr algn="ctr"/>
-                      <a:r>
-                        <a:rPr sz="1600" b="1">
-                          <a:solidFill>
-                            <a:srgbClr val="FFFFFF"/>
-                          </a:solidFill>
-                          <a:latin typeface="Calibri"/>
-                        </a:rPr>
-                        <a:t>Stratified</a:t>
-                      </a:r>
-                    </a:p>
-                    <a:p>
-                      <a:pPr algn="ctr"/>
-                      <a:r>
-                        <a:rPr sz="1600" b="1">
-                          <a:solidFill>
-                            <a:srgbClr val="FFFFFF"/>
-                          </a:solidFill>
-                          <a:latin typeface="Calibri"/>
-                        </a:rPr>
-                        <a:t>blocked</a:t>
-                      </a:r>
-                    </a:p>
-                  </a:txBody>
-                  <a:tcPr marL="73152" marR="73152" marT="36576" marB="36576">
+                  <a:tcPr marL="73152" marR="73152" marT="54864" marB="54864">
                     <a:solidFill>
                       <a:srgbClr val="1F3D7A"/>
                     </a:solidFill>
                   </a:tcPr>
                 </a:tc>
               </a:tr>
-              <a:tr h="621792">
+              <a:tr h="777240">
                 <a:tc>
                   <a:txBody>
                     <a:bodyPr wrap="square"/>
@@ -4630,17 +4586,17 @@
                     <a:p>
                       <a:pPr algn="l"/>
                       <a:r>
-                        <a:rPr sz="1600" b="0">
+                        <a:rPr sz="1800" b="0">
                           <a:solidFill>
                             <a:srgbClr val="101010"/>
                           </a:solidFill>
                           <a:latin typeface="Calibri"/>
                         </a:rPr>
-                        <a:t>LDA</a:t>
+                        <a:t>Shuffled (leaky)</a:t>
                       </a:r>
                     </a:p>
                   </a:txBody>
-                  <a:tcPr marL="73152" marR="73152" marT="36576" marB="36576">
+                  <a:tcPr marL="73152" marR="73152" marT="54864" marB="54864">
                     <a:solidFill>
                       <a:srgbClr val="FAFAFC"/>
                     </a:solidFill>
@@ -4653,17 +4609,17 @@
                     <a:p>
                       <a:pPr algn="ctr"/>
                       <a:r>
-                        <a:rPr sz="1600" b="0">
+                        <a:rPr sz="1800" b="0">
                           <a:solidFill>
                             <a:srgbClr val="101010"/>
                           </a:solidFill>
                           <a:latin typeface="Calibri"/>
                         </a:rPr>
-                        <a:t>0.647 ± 0.006</a:t>
+                        <a:t>1</a:t>
                       </a:r>
                     </a:p>
                   </a:txBody>
-                  <a:tcPr marL="73152" marR="73152" marT="36576" marB="36576">
+                  <a:tcPr marL="73152" marR="73152" marT="54864" marB="54864">
                     <a:solidFill>
                       <a:srgbClr val="FAFAFC"/>
                     </a:solidFill>
@@ -4676,17 +4632,42 @@
                     <a:p>
                       <a:pPr algn="ctr"/>
                       <a:r>
-                        <a:rPr sz="1600" b="0">
+                        <a:rPr sz="1800" b="0">
                           <a:solidFill>
                             <a:srgbClr val="101010"/>
                           </a:solidFill>
                           <a:latin typeface="Calibri"/>
                         </a:rPr>
-                        <a:t>0.408 ± 0.122</a:t>
+                        <a:t>0.9728 ± 0.0037</a:t>
                       </a:r>
                     </a:p>
                   </a:txBody>
-                  <a:tcPr marL="73152" marR="73152" marT="36576" marB="36576">
+                  <a:tcPr marL="73152" marR="73152" marT="54864" marB="54864">
+                    <a:solidFill>
+                      <a:srgbClr val="FAFAFC"/>
+                    </a:solidFill>
+                  </a:tcPr>
+                </a:tc>
+              </a:tr>
+              <a:tr h="777240">
+                <a:tc>
+                  <a:txBody>
+                    <a:bodyPr wrap="square"/>
+                    <a:lstStyle/>
+                    <a:p>
+                      <a:pPr algn="l"/>
+                      <a:r>
+                        <a:rPr sz="1800" b="0">
+                          <a:solidFill>
+                            <a:srgbClr val="101010"/>
+                          </a:solidFill>
+                          <a:latin typeface="Calibri"/>
+                        </a:rPr>
+                        <a:t>Naive blocked</a:t>
+                      </a:r>
+                    </a:p>
+                  </a:txBody>
+                  <a:tcPr marL="73152" marR="73152" marT="54864" marB="54864">
                     <a:solidFill>
                       <a:srgbClr val="FAFAFC"/>
                     </a:solidFill>
@@ -4699,24 +4680,47 @@
                     <a:p>
                       <a:pPr algn="ctr"/>
                       <a:r>
-                        <a:rPr sz="1600" b="1">
+                        <a:rPr sz="1800" b="0">
                           <a:solidFill>
                             <a:srgbClr val="101010"/>
                           </a:solidFill>
                           <a:latin typeface="Calibri"/>
                         </a:rPr>
-                        <a:t>0.591 ± 0.047</a:t>
+                        <a:t>1</a:t>
                       </a:r>
                     </a:p>
                   </a:txBody>
-                  <a:tcPr marL="73152" marR="73152" marT="36576" marB="36576">
+                  <a:tcPr marL="73152" marR="73152" marT="54864" marB="54864">
+                    <a:solidFill>
+                      <a:srgbClr val="FAFAFC"/>
+                    </a:solidFill>
+                  </a:tcPr>
+                </a:tc>
+                <a:tc>
+                  <a:txBody>
+                    <a:bodyPr wrap="square"/>
+                    <a:lstStyle/>
+                    <a:p>
+                      <a:pPr algn="ctr"/>
+                      <a:r>
+                        <a:rPr sz="1800" b="0">
+                          <a:solidFill>
+                            <a:srgbClr val="101010"/>
+                          </a:solidFill>
+                          <a:latin typeface="Calibri"/>
+                        </a:rPr>
+                        <a:t>0.5004 ± 0.1068</a:t>
+                      </a:r>
+                    </a:p>
+                  </a:txBody>
+                  <a:tcPr marL="73152" marR="73152" marT="54864" marB="54864">
                     <a:solidFill>
                       <a:srgbClr val="FAFAFC"/>
                     </a:solidFill>
                   </a:tcPr>
                 </a:tc>
               </a:tr>
-              <a:tr h="621792">
+              <a:tr h="777240">
                 <a:tc>
                   <a:txBody>
                     <a:bodyPr wrap="square"/>
@@ -4724,17 +4728,17 @@
                     <a:p>
                       <a:pPr algn="l"/>
                       <a:r>
-                        <a:rPr sz="1600" b="0">
+                        <a:rPr sz="1800" b="0">
                           <a:solidFill>
                             <a:srgbClr val="101010"/>
                           </a:solidFill>
                           <a:latin typeface="Calibri"/>
                         </a:rPr>
-                        <a:t>KNN (k=1)</a:t>
+                        <a:t>Stratified blocked (honest)</a:t>
                       </a:r>
                     </a:p>
                   </a:txBody>
-                  <a:tcPr marL="73152" marR="73152" marT="36576" marB="36576">
+                  <a:tcPr marL="73152" marR="73152" marT="54864" marB="54864">
                     <a:solidFill>
                       <a:srgbClr val="F5EAC8"/>
                     </a:solidFill>
@@ -4747,17 +4751,17 @@
                     <a:p>
                       <a:pPr algn="ctr"/>
                       <a:r>
-                        <a:rPr sz="1600" b="0">
+                        <a:rPr sz="1800" b="0">
                           <a:solidFill>
                             <a:srgbClr val="101010"/>
                           </a:solidFill>
                           <a:latin typeface="Calibri"/>
                         </a:rPr>
-                        <a:t>0.973 ± 0.004</a:t>
+                        <a:t>1</a:t>
                       </a:r>
                     </a:p>
                   </a:txBody>
-                  <a:tcPr marL="73152" marR="73152" marT="36576" marB="36576">
+                  <a:tcPr marL="73152" marR="73152" marT="54864" marB="54864">
                     <a:solidFill>
                       <a:srgbClr val="F5EAC8"/>
                     </a:solidFill>
@@ -4770,230 +4774,19 @@
                     <a:p>
                       <a:pPr algn="ctr"/>
                       <a:r>
-                        <a:rPr sz="1600" b="0">
+                        <a:rPr sz="1800" b="1">
                           <a:solidFill>
                             <a:srgbClr val="101010"/>
                           </a:solidFill>
                           <a:latin typeface="Calibri"/>
                         </a:rPr>
-                        <a:t>0.500 ± 0.107</a:t>
+                        <a:t>0.7778 ± 0.0274</a:t>
                       </a:r>
                     </a:p>
                   </a:txBody>
-                  <a:tcPr marL="73152" marR="73152" marT="36576" marB="36576">
+                  <a:tcPr marL="73152" marR="73152" marT="54864" marB="54864">
                     <a:solidFill>
                       <a:srgbClr val="F5EAC8"/>
-                    </a:solidFill>
-                  </a:tcPr>
-                </a:tc>
-                <a:tc>
-                  <a:txBody>
-                    <a:bodyPr wrap="square"/>
-                    <a:lstStyle/>
-                    <a:p>
-                      <a:pPr algn="ctr"/>
-                      <a:r>
-                        <a:rPr sz="1600" b="1">
-                          <a:solidFill>
-                            <a:srgbClr val="101010"/>
-                          </a:solidFill>
-                          <a:latin typeface="Calibri"/>
-                        </a:rPr>
-                        <a:t>0.778 ± 0.027</a:t>
-                      </a:r>
-                    </a:p>
-                  </a:txBody>
-                  <a:tcPr marL="73152" marR="73152" marT="36576" marB="36576">
-                    <a:solidFill>
-                      <a:srgbClr val="F5EAC8"/>
-                    </a:solidFill>
-                  </a:tcPr>
-                </a:tc>
-              </a:tr>
-              <a:tr h="621792">
-                <a:tc>
-                  <a:txBody>
-                    <a:bodyPr wrap="square"/>
-                    <a:lstStyle/>
-                    <a:p>
-                      <a:pPr algn="l"/>
-                      <a:r>
-                        <a:rPr sz="1600" b="0">
-                          <a:solidFill>
-                            <a:srgbClr val="101010"/>
-                          </a:solidFill>
-                          <a:latin typeface="Calibri"/>
-                        </a:rPr>
-                        <a:t>PCA→LDA (n=3)</a:t>
-                      </a:r>
-                    </a:p>
-                  </a:txBody>
-                  <a:tcPr marL="73152" marR="73152" marT="36576" marB="36576">
-                    <a:solidFill>
-                      <a:srgbClr val="FAFAFC"/>
-                    </a:solidFill>
-                  </a:tcPr>
-                </a:tc>
-                <a:tc>
-                  <a:txBody>
-                    <a:bodyPr wrap="square"/>
-                    <a:lstStyle/>
-                    <a:p>
-                      <a:pPr algn="ctr"/>
-                      <a:r>
-                        <a:rPr sz="1600" b="0">
-                          <a:solidFill>
-                            <a:srgbClr val="101010"/>
-                          </a:solidFill>
-                          <a:latin typeface="Calibri"/>
-                        </a:rPr>
-                        <a:t>0.557 ± 0.015</a:t>
-                      </a:r>
-                    </a:p>
-                  </a:txBody>
-                  <a:tcPr marL="73152" marR="73152" marT="36576" marB="36576">
-                    <a:solidFill>
-                      <a:srgbClr val="FAFAFC"/>
-                    </a:solidFill>
-                  </a:tcPr>
-                </a:tc>
-                <a:tc>
-                  <a:txBody>
-                    <a:bodyPr wrap="square"/>
-                    <a:lstStyle/>
-                    <a:p>
-                      <a:pPr algn="ctr"/>
-                      <a:r>
-                        <a:rPr sz="1600" b="0">
-                          <a:solidFill>
-                            <a:srgbClr val="101010"/>
-                          </a:solidFill>
-                          <a:latin typeface="Calibri"/>
-                        </a:rPr>
-                        <a:t>0.410 ± 0.083</a:t>
-                      </a:r>
-                    </a:p>
-                  </a:txBody>
-                  <a:tcPr marL="73152" marR="73152" marT="36576" marB="36576">
-                    <a:solidFill>
-                      <a:srgbClr val="FAFAFC"/>
-                    </a:solidFill>
-                  </a:tcPr>
-                </a:tc>
-                <a:tc>
-                  <a:txBody>
-                    <a:bodyPr wrap="square"/>
-                    <a:lstStyle/>
-                    <a:p>
-                      <a:pPr algn="ctr"/>
-                      <a:r>
-                        <a:rPr sz="1600" b="1">
-                          <a:solidFill>
-                            <a:srgbClr val="101010"/>
-                          </a:solidFill>
-                          <a:latin typeface="Calibri"/>
-                        </a:rPr>
-                        <a:t>0.534 ± 0.044</a:t>
-                      </a:r>
-                    </a:p>
-                  </a:txBody>
-                  <a:tcPr marL="73152" marR="73152" marT="36576" marB="36576">
-                    <a:solidFill>
-                      <a:srgbClr val="FAFAFC"/>
-                    </a:solidFill>
-                  </a:tcPr>
-                </a:tc>
-              </a:tr>
-              <a:tr h="621792">
-                <a:tc>
-                  <a:txBody>
-                    <a:bodyPr wrap="square"/>
-                    <a:lstStyle/>
-                    <a:p>
-                      <a:pPr algn="l"/>
-                      <a:r>
-                        <a:rPr sz="1600" b="0">
-                          <a:solidFill>
-                            <a:srgbClr val="101010"/>
-                          </a:solidFill>
-                          <a:latin typeface="Calibri"/>
-                        </a:rPr>
-                        <a:t>PCR (n=2)</a:t>
-                      </a:r>
-                    </a:p>
-                  </a:txBody>
-                  <a:tcPr marL="73152" marR="73152" marT="36576" marB="36576">
-                    <a:solidFill>
-                      <a:srgbClr val="FAFAFC"/>
-                    </a:solidFill>
-                  </a:tcPr>
-                </a:tc>
-                <a:tc>
-                  <a:txBody>
-                    <a:bodyPr wrap="square"/>
-                    <a:lstStyle/>
-                    <a:p>
-                      <a:pPr algn="ctr"/>
-                      <a:r>
-                        <a:rPr sz="1600" b="0">
-                          <a:solidFill>
-                            <a:srgbClr val="101010"/>
-                          </a:solidFill>
-                          <a:latin typeface="Calibri"/>
-                        </a:rPr>
-                        <a:t>0.553 ± 0.009</a:t>
-                      </a:r>
-                    </a:p>
-                  </a:txBody>
-                  <a:tcPr marL="73152" marR="73152" marT="36576" marB="36576">
-                    <a:solidFill>
-                      <a:srgbClr val="FAFAFC"/>
-                    </a:solidFill>
-                  </a:tcPr>
-                </a:tc>
-                <a:tc>
-                  <a:txBody>
-                    <a:bodyPr wrap="square"/>
-                    <a:lstStyle/>
-                    <a:p>
-                      <a:pPr algn="ctr"/>
-                      <a:r>
-                        <a:rPr sz="1600" b="0">
-                          <a:solidFill>
-                            <a:srgbClr val="101010"/>
-                          </a:solidFill>
-                          <a:latin typeface="Calibri"/>
-                        </a:rPr>
-                        <a:t>0.408 ± 0.130</a:t>
-                      </a:r>
-                    </a:p>
-                  </a:txBody>
-                  <a:tcPr marL="73152" marR="73152" marT="36576" marB="36576">
-                    <a:solidFill>
-                      <a:srgbClr val="FAFAFC"/>
-                    </a:solidFill>
-                  </a:tcPr>
-                </a:tc>
-                <a:tc>
-                  <a:txBody>
-                    <a:bodyPr wrap="square"/>
-                    <a:lstStyle/>
-                    <a:p>
-                      <a:pPr algn="ctr"/>
-                      <a:r>
-                        <a:rPr sz="1600" b="1">
-                          <a:solidFill>
-                            <a:srgbClr val="101010"/>
-                          </a:solidFill>
-                          <a:latin typeface="Calibri"/>
-                        </a:rPr>
-                        <a:t>0.525 ± 0.018</a:t>
-                      </a:r>
-                    </a:p>
-                  </a:txBody>
-                  <a:tcPr marL="73152" marR="73152" marT="36576" marB="36576">
-                    <a:solidFill>
-                      <a:srgbClr val="FAFAFC"/>
                     </a:solidFill>
                   </a:tcPr>
                 </a:tc>
@@ -5002,74 +4795,15 @@
           </a:graphicData>
         </a:graphic>
       </p:graphicFrame>
-      <p:pic>
-        <p:nvPicPr>
-          <p:cNvPr id="34" name="Picture 33" descr="15_confusion_matrices.png"/>
-          <p:cNvPicPr>
-            <a:picLocks noChangeAspect="1"/>
-          </p:cNvPicPr>
-          <p:nvPr/>
-        </p:nvPicPr>
-        <p:blipFill>
-          <a:blip r:embed="rId4"/>
-          <a:stretch>
-            <a:fillRect/>
-          </a:stretch>
-        </p:blipFill>
-        <p:spPr>
-          <a:xfrm>
-            <a:off x="33537948" y="9326880"/>
-            <a:ext cx="5222663" cy="4754880"/>
-          </a:xfrm>
-          <a:prstGeom prst="rect">
-            <a:avLst/>
-          </a:prstGeom>
-        </p:spPr>
-      </p:pic>
-      <p:sp>
-        <p:nvSpPr>
-          <p:cNvPr id="35" name="TextBox 34"/>
-          <p:cNvSpPr txBox="1"/>
-          <p:nvPr/>
-        </p:nvSpPr>
-        <p:spPr>
-          <a:xfrm>
-            <a:off x="29321760" y="14127480"/>
-            <a:ext cx="13655040" cy="411480"/>
-          </a:xfrm>
-          <a:prstGeom prst="rect">
-            <a:avLst/>
-          </a:prstGeom>
-          <a:noFill/>
-        </p:spPr>
-        <p:txBody>
-          <a:bodyPr wrap="square" anchor="t" lIns="0" rIns="0" tIns="0" bIns="0">
-            <a:spAutoFit/>
-          </a:bodyPr>
-          <a:lstStyle/>
-          <a:p>
-            <a:pPr algn="ctr"/>
-            <a:r>
-              <a:rPr sz="1600" i="1">
-                <a:solidFill>
-                  <a:srgbClr val="404040"/>
-                </a:solidFill>
-                <a:latin typeface="Calibri"/>
-              </a:rPr>
-              <a:t>Fig. 3.  Confusion matrices on holdout test (91% class-0 — interpret with care).</a:t>
-            </a:r>
-          </a:p>
-        </p:txBody>
-      </p:sp>
-      <p:sp>
-        <p:nvSpPr>
-          <p:cNvPr id="36" name="Rectangle 35"/>
+      <p:sp>
+        <p:nvSpPr>
+          <p:cNvPr id="34" name="Rectangle 33"/>
           <p:cNvSpPr/>
           <p:nvPr/>
         </p:nvSpPr>
         <p:spPr>
           <a:xfrm>
-            <a:off x="29321760" y="14813280"/>
+            <a:off x="29321760" y="9326880"/>
             <a:ext cx="13655040" cy="640080"/>
           </a:xfrm>
           <a:prstGeom prst="rect">
@@ -5107,13 +4841,13 @@
       </p:sp>
       <p:sp>
         <p:nvSpPr>
-          <p:cNvPr id="37" name="TextBox 36"/>
+          <p:cNvPr id="35" name="TextBox 34"/>
           <p:cNvSpPr txBox="1"/>
           <p:nvPr/>
         </p:nvSpPr>
         <p:spPr>
           <a:xfrm>
-            <a:off x="29321760" y="14813280"/>
+            <a:off x="29321760" y="9326880"/>
             <a:ext cx="13655040" cy="640080"/>
           </a:xfrm>
           <a:prstGeom prst="rect">
@@ -5135,21 +4869,21 @@
                 </a:solidFill>
                 <a:latin typeface="Calibri"/>
               </a:rPr>
-              <a:t>CONCLUSIONS</a:t>
-            </a:r>
-          </a:p>
-        </p:txBody>
-      </p:sp>
-      <p:sp>
-        <p:nvSpPr>
-          <p:cNvPr id="38" name="TextBox 37"/>
+              <a:t>SUPPORTING EVIDENCE</a:t>
+            </a:r>
+          </a:p>
+        </p:txBody>
+      </p:sp>
+      <p:sp>
+        <p:nvSpPr>
+          <p:cNvPr id="36" name="TextBox 35"/>
           <p:cNvSpPr txBox="1"/>
           <p:nvPr/>
         </p:nvSpPr>
         <p:spPr>
           <a:xfrm>
-            <a:off x="29321760" y="15590520"/>
-            <a:ext cx="13655040" cy="4206240"/>
+            <a:off x="29321760" y="10104120"/>
+            <a:ext cx="13655040" cy="3291840"/>
           </a:xfrm>
           <a:prstGeom prst="rect">
             <a:avLst/>
@@ -5170,13 +4904,13 @@
               </a:spcAft>
             </a:pPr>
             <a:r>
-              <a:rPr sz="1700">
+              <a:rPr sz="1600">
                 <a:solidFill>
                   <a:srgbClr val="101010"/>
                 </a:solidFill>
                 <a:latin typeface="Calibri"/>
               </a:rPr>
-              <a:t>•  Best honest model: KNN (k=1) at 77.8% ± 2.7% stratified blocked CV — well above the 55% majority baseline and the best accuracy any model in the palette achieved under a temporally honest split.</a:t>
+              <a:t>•  We also evaluated three alternative classifiers (LDA, PCA→LDA, PCR-as-classifier) as sanity checks, sweeping their hyperparameters under the same three CV schemes.</a:t>
             </a:r>
           </a:p>
           <a:p>
@@ -5186,13 +4920,13 @@
               </a:spcAft>
             </a:pPr>
             <a:r>
-              <a:rPr sz="1700">
+              <a:rPr sz="1600">
                 <a:solidFill>
                   <a:srgbClr val="101010"/>
                 </a:solidFill>
                 <a:latin typeface="Calibri"/>
               </a:rPr>
-              <a:t>•  Leakage gap (shuffled minus stratified blocked) averages ~13 pp across models and reaches ~19.5 pp on KNN, which exploits lag-1 autocorrelation almost perfectly when adjacent samples land in the same fold.</a:t>
+              <a:t>•  LDA leakage gap (shuffled minus stratified blocked): +5.6 pp.</a:t>
             </a:r>
           </a:p>
           <a:p>
@@ -5202,13 +4936,104 @@
               </a:spcAft>
             </a:pPr>
             <a:r>
-              <a:rPr sz="1700">
+              <a:rPr sz="1600">
                 <a:solidFill>
                   <a:srgbClr val="101010"/>
                 </a:solidFill>
                 <a:latin typeface="Calibri"/>
               </a:rPr>
-              <a:t>•  Pedagogical implication: published EEG eye-state results above 95% almost certainly reflect shuffled-CV leakage rather than genuine discrimination from the raw voltage vector alone.</a:t>
+              <a:t>•  PCA→LDA (n=3) leakage gap: +2.4 pp.</a:t>
+            </a:r>
+          </a:p>
+          <a:p>
+            <a:pPr algn="l">
+              <a:spcAft>
+                <a:spcPts val="400"/>
+              </a:spcAft>
+            </a:pPr>
+            <a:r>
+              <a:rPr sz="1600">
+                <a:solidFill>
+                  <a:srgbClr val="101010"/>
+                </a:solidFill>
+                <a:latin typeface="Calibri"/>
+              </a:rPr>
+              <a:t>•  PCR-as-classifier (n=2) leakage gap: +2.8 pp.</a:t>
+            </a:r>
+          </a:p>
+          <a:p>
+            <a:pPr algn="l">
+              <a:spcAft>
+                <a:spcPts val="400"/>
+              </a:spcAft>
+            </a:pPr>
+            <a:r>
+              <a:rPr sz="1600">
+                <a:solidFill>
+                  <a:srgbClr val="101010"/>
+                </a:solidFill>
+                <a:latin typeface="Calibri"/>
+              </a:rPr>
+              <a:t>•  KNN's +19.5 pp gap is the outlier — consistent with KNN exploiting per-sample similarity while LDA / PCA→LDA / PCR average over many samples before deciding. See figure 14 + tables/03 for full numbers.</a:t>
+            </a:r>
+          </a:p>
+        </p:txBody>
+      </p:sp>
+      <p:pic>
+        <p:nvPicPr>
+          <p:cNvPr id="37" name="Picture 36" descr="14_cv_comparison_three_way.png"/>
+          <p:cNvPicPr>
+            <a:picLocks noChangeAspect="1"/>
+          </p:cNvPicPr>
+          <p:nvPr/>
+        </p:nvPicPr>
+        <p:blipFill>
+          <a:blip r:embed="rId4"/>
+          <a:stretch>
+            <a:fillRect/>
+          </a:stretch>
+        </p:blipFill>
+        <p:spPr>
+          <a:xfrm>
+            <a:off x="34165899" y="13578840"/>
+            <a:ext cx="3966762" cy="2286000"/>
+          </a:xfrm>
+          <a:prstGeom prst="rect">
+            <a:avLst/>
+          </a:prstGeom>
+        </p:spPr>
+      </p:pic>
+      <p:sp>
+        <p:nvSpPr>
+          <p:cNvPr id="38" name="TextBox 37"/>
+          <p:cNvSpPr txBox="1"/>
+          <p:nvPr/>
+        </p:nvSpPr>
+        <p:spPr>
+          <a:xfrm>
+            <a:off x="29321760" y="15910560"/>
+            <a:ext cx="13655040" cy="411480"/>
+          </a:xfrm>
+          <a:prstGeom prst="rect">
+            <a:avLst/>
+          </a:prstGeom>
+          <a:noFill/>
+        </p:spPr>
+        <p:txBody>
+          <a:bodyPr wrap="square" anchor="t" lIns="0" rIns="0" tIns="0" bIns="0">
+            <a:spAutoFit/>
+          </a:bodyPr>
+          <a:lstStyle/>
+          <a:p>
+            <a:pPr algn="ctr"/>
+            <a:r>
+              <a:rPr sz="1600" i="1">
+                <a:solidFill>
+                  <a:srgbClr val="404040"/>
+                </a:solidFill>
+                <a:latin typeface="Calibri"/>
+              </a:rPr>
+              <a:t>Fig. 3.  Supporting figure — three-way CV comparison across LDA / KNN / PCA→LDA / PCR. KNN bar group has the largest leakage gap.</a:t>
             </a:r>
           </a:p>
         </p:txBody>
@@ -5221,7 +5046,7 @@
         </p:nvSpPr>
         <p:spPr>
           <a:xfrm>
-            <a:off x="29321760" y="20025360"/>
+            <a:off x="29321760" y="16504920"/>
             <a:ext cx="13655040" cy="640080"/>
           </a:xfrm>
           <a:prstGeom prst="rect">
@@ -5265,7 +5090,7 @@
         </p:nvSpPr>
         <p:spPr>
           <a:xfrm>
-            <a:off x="29321760" y="20025360"/>
+            <a:off x="29321760" y="16504920"/>
             <a:ext cx="13655040" cy="640080"/>
           </a:xfrm>
           <a:prstGeom prst="rect">
@@ -5287,7 +5112,7 @@
                 </a:solidFill>
                 <a:latin typeface="Calibri"/>
               </a:rPr>
-              <a:t>FUTURE WORK</a:t>
+              <a:t>CONCLUSIONS</a:t>
             </a:r>
           </a:p>
         </p:txBody>
@@ -5300,8 +5125,8 @@
         </p:nvSpPr>
         <p:spPr>
           <a:xfrm>
-            <a:off x="29321760" y="20802600"/>
-            <a:ext cx="13655040" cy="2468880"/>
+            <a:off x="29321760" y="17282160"/>
+            <a:ext cx="13655040" cy="4023360"/>
           </a:xfrm>
           <a:prstGeom prst="rect">
             <a:avLst/>
@@ -5322,13 +5147,13 @@
               </a:spcAft>
             </a:pPr>
             <a:r>
-              <a:rPr sz="1700">
+              <a:rPr sz="1500">
                 <a:solidFill>
                   <a:srgbClr val="101010"/>
                 </a:solidFill>
                 <a:latin typeface="Calibri"/>
               </a:rPr>
-              <a:t>•  Windowed features (rolling channel means/variances) to give models temporal context without leakage.</a:t>
+              <a:t>•  (1) The same KNN-k-sweep model-selection procedure picks k = 1 under all three CV schemes — but the accuracy at that k varies by 47 percentage points (50.0% naive blocked → 97.3% shuffled).</a:t>
             </a:r>
           </a:p>
           <a:p>
@@ -5338,13 +5163,13 @@
               </a:spcAft>
             </a:pPr>
             <a:r>
-              <a:rPr sz="1700">
+              <a:rPr sz="1500">
                 <a:solidFill>
                   <a:srgbClr val="101010"/>
                 </a:solidFill>
                 <a:latin typeface="Calibri"/>
               </a:rPr>
-              <a:t>•  Cross-subject generalisation — single-subject data tells us nothing about inter-subject transfer.</a:t>
+              <a:t>•  (2) The honest accuracy at k = 1 (stratified blocked CV) is 77.8% ± 2.7% — well above the 55.12% majority-class baseline.</a:t>
             </a:r>
           </a:p>
           <a:p>
@@ -5354,13 +5179,29 @@
               </a:spcAft>
             </a:pPr>
             <a:r>
-              <a:rPr sz="1700">
+              <a:rPr sz="1500">
                 <a:solidFill>
                   <a:srgbClr val="101010"/>
                 </a:solidFill>
                 <a:latin typeface="Calibri"/>
               </a:rPr>
-              <a:t>•  Longer recordings with more label transitions per subject to make blocked CV less brittle.</a:t>
+              <a:t>•  (3) The 19.5 pp gap between the leaky and honest estimates is leakage attributable to scheme choice, not signal from a better model.</a:t>
+            </a:r>
+          </a:p>
+          <a:p>
+            <a:pPr algn="l">
+              <a:spcAft>
+                <a:spcPts val="400"/>
+              </a:spcAft>
+            </a:pPr>
+            <a:r>
+              <a:rPr sz="1500">
+                <a:solidFill>
+                  <a:srgbClr val="101010"/>
+                </a:solidFill>
+                <a:latin typeface="Calibri"/>
+              </a:rPr>
+              <a:t>•  (4) Alternative classifiers (LDA / PCA→LDA / PCR) confirm KNN is uniquely vulnerable — their leakage gaps are only 2–6 pp, as theory predicts for classifiers that do not depend on per-sample similarity.</a:t>
             </a:r>
           </a:p>
         </p:txBody>
@@ -5373,7 +5214,7 @@
         </p:nvSpPr>
         <p:spPr>
           <a:xfrm>
-            <a:off x="29321760" y="23500080"/>
+            <a:off x="29321760" y="21534120"/>
             <a:ext cx="13655040" cy="640080"/>
           </a:xfrm>
           <a:prstGeom prst="rect">
@@ -5417,7 +5258,7 @@
         </p:nvSpPr>
         <p:spPr>
           <a:xfrm>
-            <a:off x="29321760" y="23500080"/>
+            <a:off x="29321760" y="21534120"/>
             <a:ext cx="13655040" cy="640080"/>
           </a:xfrm>
           <a:prstGeom prst="rect">
@@ -5452,8 +5293,8 @@
         </p:nvSpPr>
         <p:spPr>
           <a:xfrm>
-            <a:off x="29321760" y="24277320"/>
-            <a:ext cx="13655040" cy="7360920"/>
+            <a:off x="29321760" y="22311360"/>
+            <a:ext cx="13655040" cy="9326880"/>
           </a:xfrm>
           <a:prstGeom prst="rect">
             <a:avLst/>
@@ -5512,7 +5353,7 @@
                 </a:solidFill>
                 <a:latin typeface="Calibri"/>
               </a:rPr>
-              <a:t>[3] Roy, Y., Banville, H., Albuquerque, I., et al. (2019). Deep learning-based EEG analysis: a systematic review. J. Neural Eng. 16(5):051001.</a:t>
+              <a:t>[3] James, G., Witten, D., Hastie, T., Tibshirani, R. (2021). An Introduction to Statistical Learning, 2nd ed. Springer.</a:t>
             </a:r>
           </a:p>
           <a:p>
@@ -5528,23 +5369,7 @@
                 </a:solidFill>
                 <a:latin typeface="Calibri"/>
               </a:rPr>
-              <a:t>[4] Schirrmeister, R. T., Springenberg, J. T., et al. (2017). Deep learning with CNNs for EEG decoding and visualization. Hum. Brain Mapp. 38(11):5391–5420.</a:t>
-            </a:r>
-          </a:p>
-          <a:p>
-            <a:pPr algn="l">
-              <a:spcAft>
-                <a:spcPts val="300"/>
-              </a:spcAft>
-            </a:pPr>
-            <a:r>
-              <a:rPr sz="1400">
-                <a:solidFill>
-                  <a:srgbClr val="101010"/>
-                </a:solidFill>
-                <a:latin typeface="Calibri"/>
-              </a:rPr>
-              <a:t>[5] James, G., Witten, D., Hastie, T., Tibshirani, R. (2021). An Introduction to Statistical Learning, 2nd ed. Springer.</a:t>
+              <a:t>[4] Bergmeir, C., Benítez, J. M. (2012). On the use of cross-validation for time series predictor evaluation. Information Sciences 191:192–213.</a:t>
             </a:r>
           </a:p>
         </p:txBody>
